--- a/modulo1.pptx
+++ b/modulo1.pptx
@@ -727,7 +727,9 @@
         <p:txBody>
           <a:bodyPr/>
           <a:lstStyle/>
-          <a:p/>
+          <a:p>
+            <a:endParaRPr/>
+          </a:p>
         </p:txBody>
       </p:sp>
       <p:sp>
@@ -793,7 +795,9 @@
         <p:txBody>
           <a:bodyPr/>
           <a:lstStyle/>
-          <a:p/>
+          <a:p>
+            <a:endParaRPr/>
+          </a:p>
         </p:txBody>
       </p:sp>
       <p:sp>
@@ -859,7 +863,9 @@
         <p:txBody>
           <a:bodyPr/>
           <a:lstStyle/>
-          <a:p/>
+          <a:p>
+            <a:endParaRPr/>
+          </a:p>
         </p:txBody>
       </p:sp>
       <p:sp>
@@ -925,7 +931,9 @@
         <p:txBody>
           <a:bodyPr/>
           <a:lstStyle/>
-          <a:p/>
+          <a:p>
+            <a:endParaRPr/>
+          </a:p>
         </p:txBody>
       </p:sp>
       <p:sp>
@@ -991,7 +999,9 @@
         <p:txBody>
           <a:bodyPr/>
           <a:lstStyle/>
-          <a:p/>
+          <a:p>
+            <a:endParaRPr/>
+          </a:p>
         </p:txBody>
       </p:sp>
       <p:sp>
@@ -1057,7 +1067,9 @@
         <p:txBody>
           <a:bodyPr/>
           <a:lstStyle/>
-          <a:p/>
+          <a:p>
+            <a:endParaRPr/>
+          </a:p>
         </p:txBody>
       </p:sp>
       <p:sp>
@@ -1123,7 +1135,9 @@
         <p:txBody>
           <a:bodyPr/>
           <a:lstStyle/>
-          <a:p/>
+          <a:p>
+            <a:endParaRPr/>
+          </a:p>
         </p:txBody>
       </p:sp>
       <p:sp>
@@ -1189,7 +1203,9 @@
         <p:txBody>
           <a:bodyPr/>
           <a:lstStyle/>
-          <a:p/>
+          <a:p>
+            <a:endParaRPr/>
+          </a:p>
         </p:txBody>
       </p:sp>
       <p:sp>
@@ -1255,7 +1271,9 @@
         <p:txBody>
           <a:bodyPr/>
           <a:lstStyle/>
-          <a:p/>
+          <a:p>
+            <a:endParaRPr/>
+          </a:p>
         </p:txBody>
       </p:sp>
       <p:sp>
@@ -1321,7 +1339,9 @@
         <p:txBody>
           <a:bodyPr/>
           <a:lstStyle/>
-          <a:p/>
+          <a:p>
+            <a:endParaRPr/>
+          </a:p>
         </p:txBody>
       </p:sp>
       <p:sp>
@@ -1387,7 +1407,9 @@
         <p:txBody>
           <a:bodyPr/>
           <a:lstStyle/>
-          <a:p/>
+          <a:p>
+            <a:endParaRPr/>
+          </a:p>
         </p:txBody>
       </p:sp>
       <p:sp>
@@ -1453,7 +1475,9 @@
         <p:txBody>
           <a:bodyPr/>
           <a:lstStyle/>
-          <a:p/>
+          <a:p>
+            <a:endParaRPr/>
+          </a:p>
         </p:txBody>
       </p:sp>
       <p:sp>
@@ -1519,7 +1543,9 @@
         <p:txBody>
           <a:bodyPr/>
           <a:lstStyle/>
-          <a:p/>
+          <a:p>
+            <a:endParaRPr/>
+          </a:p>
         </p:txBody>
       </p:sp>
       <p:sp>
@@ -1585,7 +1611,9 @@
         <p:txBody>
           <a:bodyPr/>
           <a:lstStyle/>
-          <a:p/>
+          <a:p>
+            <a:endParaRPr/>
+          </a:p>
         </p:txBody>
       </p:sp>
       <p:sp>
@@ -1651,7 +1679,9 @@
         <p:txBody>
           <a:bodyPr/>
           <a:lstStyle/>
-          <a:p/>
+          <a:p>
+            <a:endParaRPr/>
+          </a:p>
         </p:txBody>
       </p:sp>
       <p:sp>
@@ -1717,7 +1747,9 @@
         <p:txBody>
           <a:bodyPr/>
           <a:lstStyle/>
-          <a:p/>
+          <a:p>
+            <a:endParaRPr/>
+          </a:p>
         </p:txBody>
       </p:sp>
       <p:sp>
@@ -1783,7 +1815,9 @@
         <p:txBody>
           <a:bodyPr/>
           <a:lstStyle/>
-          <a:p/>
+          <a:p>
+            <a:endParaRPr/>
+          </a:p>
         </p:txBody>
       </p:sp>
       <p:sp>
@@ -1849,7 +1883,9 @@
         <p:txBody>
           <a:bodyPr/>
           <a:lstStyle/>
-          <a:p/>
+          <a:p>
+            <a:endParaRPr/>
+          </a:p>
         </p:txBody>
       </p:sp>
       <p:sp>
@@ -1915,7 +1951,9 @@
         <p:txBody>
           <a:bodyPr/>
           <a:lstStyle/>
-          <a:p/>
+          <a:p>
+            <a:endParaRPr/>
+          </a:p>
         </p:txBody>
       </p:sp>
       <p:sp>
@@ -1981,7 +2019,9 @@
         <p:txBody>
           <a:bodyPr/>
           <a:lstStyle/>
-          <a:p/>
+          <a:p>
+            <a:endParaRPr/>
+          </a:p>
         </p:txBody>
       </p:sp>
       <p:sp>
@@ -2047,7 +2087,9 @@
         <p:txBody>
           <a:bodyPr/>
           <a:lstStyle/>
-          <a:p/>
+          <a:p>
+            <a:endParaRPr/>
+          </a:p>
         </p:txBody>
       </p:sp>
       <p:sp>
@@ -2113,7 +2155,9 @@
         <p:txBody>
           <a:bodyPr/>
           <a:lstStyle/>
-          <a:p/>
+          <a:p>
+            <a:endParaRPr/>
+          </a:p>
         </p:txBody>
       </p:sp>
       <p:sp>
@@ -2179,7 +2223,9 @@
         <p:txBody>
           <a:bodyPr/>
           <a:lstStyle/>
-          <a:p/>
+          <a:p>
+            <a:endParaRPr/>
+          </a:p>
         </p:txBody>
       </p:sp>
       <p:sp>
@@ -2245,7 +2291,9 @@
         <p:txBody>
           <a:bodyPr/>
           <a:lstStyle/>
-          <a:p/>
+          <a:p>
+            <a:endParaRPr/>
+          </a:p>
         </p:txBody>
       </p:sp>
       <p:sp>
@@ -2311,7 +2359,9 @@
         <p:txBody>
           <a:bodyPr/>
           <a:lstStyle/>
-          <a:p/>
+          <a:p>
+            <a:endParaRPr/>
+          </a:p>
         </p:txBody>
       </p:sp>
       <p:sp>
@@ -2377,7 +2427,9 @@
         <p:txBody>
           <a:bodyPr/>
           <a:lstStyle/>
-          <a:p/>
+          <a:p>
+            <a:endParaRPr/>
+          </a:p>
         </p:txBody>
       </p:sp>
       <p:sp>
@@ -2443,7 +2495,9 @@
         <p:txBody>
           <a:bodyPr/>
           <a:lstStyle/>
-          <a:p/>
+          <a:p>
+            <a:endParaRPr/>
+          </a:p>
         </p:txBody>
       </p:sp>
       <p:sp>
@@ -2509,7 +2563,9 @@
         <p:txBody>
           <a:bodyPr/>
           <a:lstStyle/>
-          <a:p/>
+          <a:p>
+            <a:endParaRPr/>
+          </a:p>
         </p:txBody>
       </p:sp>
       <p:sp>
@@ -2575,7 +2631,9 @@
         <p:txBody>
           <a:bodyPr/>
           <a:lstStyle/>
-          <a:p/>
+          <a:p>
+            <a:endParaRPr/>
+          </a:p>
         </p:txBody>
       </p:sp>
       <p:sp>
@@ -6202,18 +6260,18 @@
       </p:par>
     </p:tnLst>
     <p:bldLst>
-      <p:bldP spid="3" grpId="0" build="whole" animBg="1"/>
-      <p:bldP spid="4" grpId="0" build="whole" animBg="1"/>
-      <p:bldP spid="5" grpId="0" build="whole" animBg="1"/>
-      <p:bldP spid="6" grpId="0" build="whole" animBg="1"/>
-      <p:bldP spid="7" grpId="0" build="whole" animBg="1"/>
-      <p:bldP spid="8" grpId="0" build="whole" animBg="1"/>
-      <p:bldP spid="9" grpId="0" build="whole" animBg="1"/>
-      <p:bldP spid="10" grpId="0" build="whole" animBg="1"/>
-      <p:bldP spid="11" grpId="0" build="whole" animBg="1"/>
-      <p:bldP spid="12" grpId="0" build="whole" animBg="1"/>
-      <p:bldP spid="13" grpId="0" build="whole" animBg="1"/>
-      <p:bldP spid="14" grpId="0" build="whole" animBg="1"/>
+      <p:bldP spid="3" grpId="0" animBg="1"/>
+      <p:bldP spid="4" grpId="0" animBg="1"/>
+      <p:bldP spid="5" grpId="0" animBg="1"/>
+      <p:bldP spid="6" grpId="0" animBg="1"/>
+      <p:bldP spid="7" grpId="0" animBg="1"/>
+      <p:bldP spid="8" grpId="0" animBg="1"/>
+      <p:bldP spid="9" grpId="0" animBg="1"/>
+      <p:bldP spid="10" grpId="0" animBg="1"/>
+      <p:bldP spid="11" grpId="0" animBg="1"/>
+      <p:bldP spid="12" grpId="0" animBg="1"/>
+      <p:bldP spid="13" grpId="0" animBg="1"/>
+      <p:bldP spid="14" grpId="0" animBg="1"/>
     </p:bldLst>
   </p:timing>
 </p:sld>
@@ -6695,9 +6753,9 @@
       </p:par>
     </p:tnLst>
     <p:bldLst>
-      <p:bldP spid="3" grpId="0" build="whole" animBg="1"/>
-      <p:bldP spid="4" grpId="0" build="whole" animBg="1"/>
-      <p:bldP spid="5" grpId="0" build="whole" animBg="1"/>
+      <p:bldP spid="3" grpId="0" animBg="1"/>
+      <p:bldP spid="4" grpId="0" animBg="1"/>
+      <p:bldP spid="5" grpId="0" animBg="1"/>
     </p:bldLst>
   </p:timing>
 </p:sld>
@@ -8447,19 +8505,19 @@
       </p:par>
     </p:tnLst>
     <p:bldLst>
-      <p:bldP spid="3" grpId="0" build="whole" animBg="1"/>
-      <p:bldP spid="4" grpId="0" build="whole" animBg="1"/>
-      <p:bldP spid="5" grpId="0" build="whole" animBg="1"/>
-      <p:bldP spid="6" grpId="0" build="whole" animBg="1"/>
-      <p:bldP spid="7" grpId="0" build="whole" animBg="1"/>
-      <p:bldP spid="8" grpId="0" build="whole" animBg="1"/>
-      <p:bldP spid="9" grpId="0" build="whole" animBg="1"/>
-      <p:bldP spid="10" grpId="0" build="whole" animBg="1"/>
-      <p:bldP spid="11" grpId="0" build="whole" animBg="1"/>
-      <p:bldP spid="12" grpId="0" build="whole" animBg="1"/>
-      <p:bldP spid="13" grpId="0" build="whole" animBg="1"/>
-      <p:bldP spid="14" grpId="0" build="whole" animBg="1"/>
-      <p:bldP spid="15" grpId="0" build="whole" animBg="1"/>
+      <p:bldP spid="3" grpId="0" animBg="1"/>
+      <p:bldP spid="4" grpId="0" animBg="1"/>
+      <p:bldP spid="5" grpId="0" animBg="1"/>
+      <p:bldP spid="6" grpId="0" animBg="1"/>
+      <p:bldP spid="7" grpId="0" animBg="1"/>
+      <p:bldP spid="8" grpId="0" animBg="1"/>
+      <p:bldP spid="9" grpId="0" animBg="1"/>
+      <p:bldP spid="10" grpId="0" animBg="1"/>
+      <p:bldP spid="11" grpId="0" animBg="1"/>
+      <p:bldP spid="12" grpId="0" animBg="1"/>
+      <p:bldP spid="13" grpId="0" animBg="1"/>
+      <p:bldP spid="14" grpId="0" animBg="1"/>
+      <p:bldP spid="15" grpId="0" animBg="1"/>
     </p:bldLst>
   </p:timing>
 </p:sld>
@@ -8969,7 +9027,7 @@
                             </p:stCondLst>
                             <p:childTnLst>
                               <p:par>
-                                <p:cTn id="9" presetID="53" presetClass="entr" presetSubtype="16" fill="hold" grpId="0" nodeType="afterEffect">
+                                <p:cTn id="9" presetID="53" presetClass="entr" presetSubtype="16" fill="hold" nodeType="afterEffect">
                                   <p:stCondLst>
                                     <p:cond delay="0"/>
                                   </p:stCondLst>
@@ -9077,7 +9135,7 @@
       </p:par>
     </p:tnLst>
     <p:bldLst>
-      <p:bldP spid="4" grpId="0" build="whole" animBg="1"/>
+      <p:bldP spid="4" grpId="0" animBg="1"/>
     </p:bldLst>
   </p:timing>
 </p:sld>
@@ -10279,15 +10337,15 @@
       </p:par>
     </p:tnLst>
     <p:bldLst>
-      <p:bldP spid="3" grpId="0" build="whole" animBg="1"/>
-      <p:bldP spid="4" grpId="0" build="whole" animBg="1"/>
-      <p:bldP spid="5" grpId="0" build="whole" animBg="1"/>
-      <p:bldP spid="6" grpId="0" build="whole" animBg="1"/>
-      <p:bldP spid="7" grpId="0" build="whole" animBg="1"/>
-      <p:bldP spid="8" grpId="0" build="whole" animBg="1"/>
-      <p:bldP spid="9" grpId="0" build="whole" animBg="1"/>
-      <p:bldP spid="10" grpId="0" build="whole" animBg="1"/>
-      <p:bldP spid="11" grpId="0" build="whole" animBg="1"/>
+      <p:bldP spid="3" grpId="0" animBg="1"/>
+      <p:bldP spid="4" grpId="0" animBg="1"/>
+      <p:bldP spid="5" grpId="0" animBg="1"/>
+      <p:bldP spid="6" grpId="0" animBg="1"/>
+      <p:bldP spid="7" grpId="0" animBg="1"/>
+      <p:bldP spid="8" grpId="0" animBg="1"/>
+      <p:bldP spid="9" grpId="0" animBg="1"/>
+      <p:bldP spid="10" grpId="0" animBg="1"/>
+      <p:bldP spid="11" grpId="0" animBg="1"/>
     </p:bldLst>
   </p:timing>
 </p:sld>
@@ -11564,15 +11622,15 @@
       </p:par>
     </p:tnLst>
     <p:bldLst>
-      <p:bldP spid="3" grpId="0" build="whole" animBg="1"/>
-      <p:bldP spid="4" grpId="0" build="whole" animBg="1"/>
-      <p:bldP spid="5" grpId="0" build="whole" animBg="1"/>
-      <p:bldP spid="6" grpId="0" build="whole" animBg="1"/>
-      <p:bldP spid="7" grpId="0" build="whole" animBg="1"/>
-      <p:bldP spid="8" grpId="0" build="whole" animBg="1"/>
-      <p:bldP spid="9" grpId="0" build="whole" animBg="1"/>
-      <p:bldP spid="10" grpId="0" build="whole" animBg="1"/>
-      <p:bldP spid="11" grpId="0" build="whole" animBg="1"/>
+      <p:bldP spid="3" grpId="0" animBg="1"/>
+      <p:bldP spid="4" grpId="0" animBg="1"/>
+      <p:bldP spid="5" grpId="0" animBg="1"/>
+      <p:bldP spid="6" grpId="0" animBg="1"/>
+      <p:bldP spid="7" grpId="0" animBg="1"/>
+      <p:bldP spid="8" grpId="0" animBg="1"/>
+      <p:bldP spid="9" grpId="0" animBg="1"/>
+      <p:bldP spid="10" grpId="0" animBg="1"/>
+      <p:bldP spid="11" grpId="0" animBg="1"/>
     </p:bldLst>
   </p:timing>
 </p:sld>
@@ -14258,26 +14316,26 @@
       </p:par>
     </p:tnLst>
     <p:bldLst>
-      <p:bldP spid="3" grpId="0" build="whole" animBg="1"/>
-      <p:bldP spid="4" grpId="0" build="whole" animBg="1"/>
-      <p:bldP spid="5" grpId="0" build="whole" animBg="1"/>
-      <p:bldP spid="6" grpId="0" build="whole" animBg="1"/>
-      <p:bldP spid="7" grpId="0" build="whole" animBg="1"/>
-      <p:bldP spid="8" grpId="0" build="whole" animBg="1"/>
-      <p:bldP spid="9" grpId="0" build="whole" animBg="1"/>
-      <p:bldP spid="10" grpId="0" build="whole" animBg="1"/>
-      <p:bldP spid="11" grpId="0" build="whole" animBg="1"/>
-      <p:bldP spid="12" grpId="0" build="whole" animBg="1"/>
-      <p:bldP spid="13" grpId="0" build="whole" animBg="1"/>
-      <p:bldP spid="14" grpId="0" build="whole" animBg="1"/>
-      <p:bldP spid="15" grpId="0" build="whole" animBg="1"/>
-      <p:bldP spid="16" grpId="0" build="whole" animBg="1"/>
-      <p:bldP spid="17" grpId="0" build="whole" animBg="1"/>
-      <p:bldP spid="18" grpId="0" build="whole" animBg="1"/>
-      <p:bldP spid="19" grpId="0" build="whole" animBg="1"/>
-      <p:bldP spid="20" grpId="0" build="whole" animBg="1"/>
-      <p:bldP spid="21" grpId="0" build="whole" animBg="1"/>
-      <p:bldP spid="22" grpId="0" build="whole" animBg="1"/>
+      <p:bldP spid="3" grpId="0" animBg="1"/>
+      <p:bldP spid="4" grpId="0" animBg="1"/>
+      <p:bldP spid="5" grpId="0" animBg="1"/>
+      <p:bldP spid="6" grpId="0" animBg="1"/>
+      <p:bldP spid="7" grpId="0" animBg="1"/>
+      <p:bldP spid="8" grpId="0" animBg="1"/>
+      <p:bldP spid="9" grpId="0" animBg="1"/>
+      <p:bldP spid="10" grpId="0" animBg="1"/>
+      <p:bldP spid="11" grpId="0" animBg="1"/>
+      <p:bldP spid="12" grpId="0" animBg="1"/>
+      <p:bldP spid="13" grpId="0" animBg="1"/>
+      <p:bldP spid="14" grpId="0" animBg="1"/>
+      <p:bldP spid="15" grpId="0" animBg="1"/>
+      <p:bldP spid="16" grpId="0" animBg="1"/>
+      <p:bldP spid="17" grpId="0" animBg="1"/>
+      <p:bldP spid="18" grpId="0" animBg="1"/>
+      <p:bldP spid="19" grpId="0" animBg="1"/>
+      <p:bldP spid="20" grpId="0" animBg="1"/>
+      <p:bldP spid="21" grpId="0" animBg="1"/>
+      <p:bldP spid="22" grpId="0" animBg="1"/>
     </p:bldLst>
   </p:timing>
 </p:sld>
@@ -16524,22 +16582,22 @@
       </p:par>
     </p:tnLst>
     <p:bldLst>
-      <p:bldP spid="3" grpId="0" build="whole" animBg="1"/>
-      <p:bldP spid="6" grpId="0" build="whole" animBg="1"/>
-      <p:bldP spid="7" grpId="0" build="whole" animBg="1"/>
-      <p:bldP spid="12" grpId="0" build="whole" animBg="1"/>
-      <p:bldP spid="4" grpId="0" build="whole" animBg="1"/>
-      <p:bldP spid="8" grpId="0" build="whole" animBg="1"/>
-      <p:bldP spid="9" grpId="0" build="whole" animBg="1"/>
-      <p:bldP spid="13" grpId="0" build="whole" animBg="1"/>
-      <p:bldP spid="14" grpId="0" build="whole" animBg="1"/>
-      <p:bldP spid="5" grpId="0" build="whole" animBg="1"/>
-      <p:bldP spid="10" grpId="0" build="whole" animBg="1"/>
-      <p:bldP spid="11" grpId="0" build="whole" animBg="1"/>
-      <p:bldP spid="15" grpId="0" build="whole" animBg="1"/>
-      <p:bldP spid="16" grpId="0" build="whole" animBg="1"/>
-      <p:bldP spid="19" grpId="0" build="whole" animBg="1"/>
-      <p:bldP spid="17" grpId="0" build="whole" animBg="1"/>
+      <p:bldP spid="3" grpId="0" animBg="1"/>
+      <p:bldP spid="4" grpId="0" animBg="1"/>
+      <p:bldP spid="5" grpId="0" animBg="1"/>
+      <p:bldP spid="6" grpId="0" animBg="1"/>
+      <p:bldP spid="7" grpId="0" animBg="1"/>
+      <p:bldP spid="8" grpId="0" animBg="1"/>
+      <p:bldP spid="9" grpId="0" animBg="1"/>
+      <p:bldP spid="10" grpId="0" animBg="1"/>
+      <p:bldP spid="11" grpId="0" animBg="1"/>
+      <p:bldP spid="12" grpId="0" animBg="1"/>
+      <p:bldP spid="13" grpId="0" animBg="1"/>
+      <p:bldP spid="14" grpId="0" animBg="1"/>
+      <p:bldP spid="15" grpId="0" animBg="1"/>
+      <p:bldP spid="16" grpId="0" animBg="1"/>
+      <p:bldP spid="17" grpId="0" animBg="1"/>
+      <p:bldP spid="19" grpId="0" animBg="1"/>
     </p:bldLst>
   </p:timing>
 </p:sld>
@@ -16839,7 +16897,7 @@
           </a:fontRef>
         </p:style>
         <p:txBody>
-          <a:bodyPr rtlCol="0" anchor="ctr" wrap="square" lIns="685800" rIns="164592" tIns="164592" bIns="164592"/>
+          <a:bodyPr wrap="square" lIns="685800" tIns="164592" rIns="164592" bIns="164592" rtlCol="0" anchor="ctr"/>
           <a:lstStyle/>
           <a:p>
             <a:pPr algn="l">
@@ -16973,7 +17031,7 @@
           </a:fontRef>
         </p:style>
         <p:txBody>
-          <a:bodyPr rtlCol="0" anchor="ctr" wrap="square" lIns="0" rIns="0" tIns="0" bIns="0"/>
+          <a:bodyPr wrap="square" lIns="0" tIns="0" rIns="0" bIns="0" rtlCol="0" anchor="ctr"/>
           <a:lstStyle/>
           <a:p>
             <a:pPr algn="ctr">
@@ -17071,7 +17129,7 @@
                             </p:stCondLst>
                             <p:childTnLst>
                               <p:par>
-                                <p:cTn id="9" presetID="53" presetClass="entr" presetSubtype="16" fill="hold" grpId="0" nodeType="afterEffect">
+                                <p:cTn id="9" presetID="53" presetClass="entr" presetSubtype="16" fill="hold" nodeType="afterEffect">
                                   <p:stCondLst>
                                     <p:cond delay="0"/>
                                   </p:stCondLst>
@@ -17258,9 +17316,9 @@
       </p:par>
     </p:tnLst>
     <p:bldLst>
-      <p:bldP spid="4" grpId="0" build="whole" animBg="1"/>
-      <p:bldP spid="5" grpId="0" build="whole" animBg="1"/>
-      <p:bldP spid="6" grpId="0" build="whole" animBg="1"/>
+      <p:bldP spid="4" grpId="0" animBg="1"/>
+      <p:bldP spid="5" grpId="0" animBg="1"/>
+      <p:bldP spid="6" grpId="0" animBg="1"/>
     </p:bldLst>
   </p:timing>
 </p:sld>
@@ -18287,7 +18345,7 @@
                             </p:stCondLst>
                             <p:childTnLst>
                               <p:par>
-                                <p:cTn id="10" presetID="22" presetClass="entr" presetSubtype="1" fill="hold" grpId="0" nodeType="afterEffect">
+                                <p:cTn id="10" presetID="22" presetClass="entr" presetSubtype="1" fill="hold" nodeType="afterEffect">
                                   <p:stCondLst>
                                     <p:cond delay="0"/>
                                   </p:stCondLst>
@@ -18398,7 +18456,7 @@
                             </p:stCondLst>
                             <p:childTnLst>
                               <p:par>
-                                <p:cTn id="19" presetID="22" presetClass="entr" presetSubtype="1" fill="hold" grpId="0" nodeType="afterEffect">
+                                <p:cTn id="19" presetID="22" presetClass="entr" presetSubtype="1" fill="hold" nodeType="afterEffect">
                                   <p:stCondLst>
                                     <p:cond delay="0"/>
                                   </p:stCondLst>
@@ -18442,7 +18500,7 @@
                             </p:stCondLst>
                             <p:childTnLst>
                               <p:par>
-                                <p:cTn id="23" presetID="22" presetClass="entr" presetSubtype="8" fill="hold" grpId="0" nodeType="afterEffect">
+                                <p:cTn id="23" presetID="22" presetClass="entr" presetSubtype="8" fill="hold" nodeType="afterEffect">
                                   <p:stCondLst>
                                     <p:cond delay="0"/>
                                   </p:stCondLst>
@@ -18486,7 +18544,7 @@
                             </p:stCondLst>
                             <p:childTnLst>
                               <p:par>
-                                <p:cTn id="27" presetID="22" presetClass="entr" presetSubtype="1" fill="hold" grpId="0" nodeType="afterEffect">
+                                <p:cTn id="27" presetID="22" presetClass="entr" presetSubtype="1" fill="hold" nodeType="afterEffect">
                                   <p:stCondLst>
                                     <p:cond delay="0"/>
                                   </p:stCondLst>
@@ -18530,7 +18588,7 @@
                             </p:stCondLst>
                             <p:childTnLst>
                               <p:par>
-                                <p:cTn id="31" presetID="22" presetClass="entr" presetSubtype="1" fill="hold" grpId="0" nodeType="afterEffect">
+                                <p:cTn id="31" presetID="22" presetClass="entr" presetSubtype="1" fill="hold" nodeType="afterEffect">
                                   <p:stCondLst>
                                     <p:cond delay="0"/>
                                   </p:stCondLst>
@@ -18574,7 +18632,7 @@
                             </p:stCondLst>
                             <p:childTnLst>
                               <p:par>
-                                <p:cTn id="35" presetID="22" presetClass="entr" presetSubtype="1" fill="hold" grpId="0" nodeType="afterEffect">
+                                <p:cTn id="35" presetID="22" presetClass="entr" presetSubtype="1" fill="hold" nodeType="afterEffect">
                                   <p:stCondLst>
                                     <p:cond delay="0"/>
                                   </p:stCondLst>
@@ -18618,7 +18676,7 @@
                             </p:stCondLst>
                             <p:childTnLst>
                               <p:par>
-                                <p:cTn id="39" presetID="22" presetClass="entr" presetSubtype="1" fill="hold" grpId="0" nodeType="afterEffect">
+                                <p:cTn id="39" presetID="22" presetClass="entr" presetSubtype="1" fill="hold" nodeType="afterEffect">
                                   <p:stCondLst>
                                     <p:cond delay="0"/>
                                   </p:stCondLst>
@@ -18662,7 +18720,7 @@
                             </p:stCondLst>
                             <p:childTnLst>
                               <p:par>
-                                <p:cTn id="43" presetID="22" presetClass="entr" presetSubtype="1" fill="hold" grpId="0" nodeType="afterEffect">
+                                <p:cTn id="43" presetID="22" presetClass="entr" presetSubtype="1" fill="hold" nodeType="afterEffect">
                                   <p:stCondLst>
                                     <p:cond delay="0"/>
                                   </p:stCondLst>
@@ -19103,14 +19161,14 @@
       </p:par>
     </p:tnLst>
     <p:bldLst>
-      <p:bldP spid="3" grpId="0" build="whole" animBg="1"/>
-      <p:bldP spid="5" grpId="0" build="whole" animBg="1"/>
-      <p:bldP spid="9" grpId="0" build="whole" animBg="1"/>
-      <p:bldP spid="11" grpId="0" build="whole" animBg="1"/>
-      <p:bldP spid="13" grpId="0" build="whole" animBg="1"/>
-      <p:bldP spid="15" grpId="0" build="whole" animBg="1"/>
-      <p:bldP spid="17" grpId="0" build="whole" animBg="1"/>
-      <p:bldP spid="18" grpId="0" build="whole" animBg="1"/>
+      <p:bldP spid="3" grpId="0" animBg="1"/>
+      <p:bldP spid="5" grpId="0" animBg="1"/>
+      <p:bldP spid="9" grpId="0" animBg="1"/>
+      <p:bldP spid="11" grpId="0" animBg="1"/>
+      <p:bldP spid="13" grpId="0" animBg="1"/>
+      <p:bldP spid="15" grpId="0" animBg="1"/>
+      <p:bldP spid="17" grpId="0" animBg="1"/>
+      <p:bldP spid="18" grpId="0" animBg="1"/>
     </p:bldLst>
   </p:timing>
 </p:sld>
@@ -19838,7 +19896,7 @@
                             </p:stCondLst>
                             <p:childTnLst>
                               <p:par>
-                                <p:cTn id="9" presetID="53" presetClass="entr" presetSubtype="16" fill="hold" grpId="0" nodeType="afterEffect">
+                                <p:cTn id="9" presetID="53" presetClass="entr" presetSubtype="16" fill="hold" nodeType="afterEffect">
                                   <p:stCondLst>
                                     <p:cond delay="0"/>
                                   </p:stCondLst>
@@ -19946,7 +20004,7 @@
       </p:par>
     </p:tnLst>
     <p:bldLst>
-      <p:bldP spid="4" grpId="0" build="whole" animBg="1"/>
+      <p:bldP spid="4" grpId="0" animBg="1"/>
     </p:bldLst>
   </p:timing>
 </p:sld>
@@ -21186,7 +21244,7 @@
                             </p:stCondLst>
                             <p:childTnLst>
                               <p:par>
-                                <p:cTn id="10" presetID="22" presetClass="entr" presetSubtype="1" fill="hold" grpId="0" nodeType="afterEffect">
+                                <p:cTn id="10" presetID="22" presetClass="entr" presetSubtype="1" fill="hold" nodeType="afterEffect">
                                   <p:stCondLst>
                                     <p:cond delay="0"/>
                                   </p:stCondLst>
@@ -21297,7 +21355,7 @@
                             </p:stCondLst>
                             <p:childTnLst>
                               <p:par>
-                                <p:cTn id="19" presetID="22" presetClass="entr" presetSubtype="1" fill="hold" grpId="0" nodeType="afterEffect">
+                                <p:cTn id="19" presetID="22" presetClass="entr" presetSubtype="1" fill="hold" nodeType="afterEffect">
                                   <p:stCondLst>
                                     <p:cond delay="0"/>
                                   </p:stCondLst>
@@ -21341,7 +21399,7 @@
                             </p:stCondLst>
                             <p:childTnLst>
                               <p:par>
-                                <p:cTn id="23" presetID="22" presetClass="entr" presetSubtype="8" fill="hold" grpId="0" nodeType="afterEffect">
+                                <p:cTn id="23" presetID="22" presetClass="entr" presetSubtype="8" fill="hold" nodeType="afterEffect">
                                   <p:stCondLst>
                                     <p:cond delay="0"/>
                                   </p:stCondLst>
@@ -21385,7 +21443,7 @@
                             </p:stCondLst>
                             <p:childTnLst>
                               <p:par>
-                                <p:cTn id="27" presetID="22" presetClass="entr" presetSubtype="1" fill="hold" grpId="0" nodeType="afterEffect">
+                                <p:cTn id="27" presetID="22" presetClass="entr" presetSubtype="1" fill="hold" nodeType="afterEffect">
                                   <p:stCondLst>
                                     <p:cond delay="0"/>
                                   </p:stCondLst>
@@ -21429,7 +21487,7 @@
                             </p:stCondLst>
                             <p:childTnLst>
                               <p:par>
-                                <p:cTn id="31" presetID="22" presetClass="entr" presetSubtype="1" fill="hold" grpId="0" nodeType="afterEffect">
+                                <p:cTn id="31" presetID="22" presetClass="entr" presetSubtype="1" fill="hold" nodeType="afterEffect">
                                   <p:stCondLst>
                                     <p:cond delay="0"/>
                                   </p:stCondLst>
@@ -21674,7 +21732,7 @@
                             </p:stCondLst>
                             <p:childTnLst>
                               <p:par>
-                                <p:cTn id="50" presetID="10" presetClass="entr" presetSubtype="0" fill="hold" grpId="0" nodeType="afterEffect">
+                                <p:cTn id="50" presetID="10" presetClass="entr" presetSubtype="0" fill="hold" nodeType="afterEffect">
                                   <p:stCondLst>
                                     <p:cond delay="0"/>
                                   </p:stCondLst>
@@ -21852,7 +21910,7 @@
                             </p:stCondLst>
                             <p:childTnLst>
                               <p:par>
-                                <p:cTn id="64" presetID="22" presetClass="entr" presetSubtype="8" fill="hold" grpId="0" nodeType="afterEffect">
+                                <p:cTn id="64" presetID="22" presetClass="entr" presetSubtype="8" fill="hold" nodeType="afterEffect">
                                   <p:stCondLst>
                                     <p:cond delay="0"/>
                                   </p:stCondLst>
@@ -21986,7 +22044,7 @@
                             </p:stCondLst>
                             <p:childTnLst>
                               <p:par>
-                                <p:cTn id="74" presetID="22" presetClass="entr" presetSubtype="8" fill="hold" grpId="0" nodeType="afterEffect">
+                                <p:cTn id="74" presetID="22" presetClass="entr" presetSubtype="8" fill="hold" nodeType="afterEffect">
                                   <p:stCondLst>
                                     <p:cond delay="0"/>
                                   </p:stCondLst>
@@ -22120,7 +22178,7 @@
                             </p:stCondLst>
                             <p:childTnLst>
                               <p:par>
-                                <p:cTn id="84" presetID="22" presetClass="entr" presetSubtype="8" fill="hold" grpId="0" nodeType="afterEffect">
+                                <p:cTn id="84" presetID="22" presetClass="entr" presetSubtype="8" fill="hold" nodeType="afterEffect">
                                   <p:stCondLst>
                                     <p:cond delay="0"/>
                                   </p:stCondLst>
@@ -22316,17 +22374,17 @@
       </p:par>
     </p:tnLst>
     <p:bldLst>
-      <p:bldP spid="3" grpId="0" build="whole" animBg="1"/>
-      <p:bldP spid="5" grpId="0" build="whole" animBg="1"/>
-      <p:bldP spid="9" grpId="0" build="whole" animBg="1"/>
-      <p:bldP spid="12" grpId="0" build="whole" animBg="1"/>
-      <p:bldP spid="11" grpId="0" build="whole" animBg="1"/>
-      <p:bldP spid="14" grpId="0" build="whole" animBg="1"/>
-      <p:bldP spid="15" grpId="0" build="whole" animBg="1"/>
-      <p:bldP spid="17" grpId="0" build="whole" animBg="1"/>
-      <p:bldP spid="19" grpId="0" build="whole" animBg="1"/>
-      <p:bldP spid="21" grpId="0" build="whole" animBg="1"/>
-      <p:bldP spid="22" grpId="0" build="whole" animBg="1"/>
+      <p:bldP spid="3" grpId="0" animBg="1"/>
+      <p:bldP spid="5" grpId="0" animBg="1"/>
+      <p:bldP spid="9" grpId="0" animBg="1"/>
+      <p:bldP spid="11" grpId="0" animBg="1"/>
+      <p:bldP spid="12" grpId="0" animBg="1"/>
+      <p:bldP spid="14" grpId="0" animBg="1"/>
+      <p:bldP spid="15" grpId="0" animBg="1"/>
+      <p:bldP spid="17" grpId="0" animBg="1"/>
+      <p:bldP spid="19" grpId="0" animBg="1"/>
+      <p:bldP spid="21" grpId="0" animBg="1"/>
+      <p:bldP spid="22" grpId="0" animBg="1"/>
     </p:bldLst>
   </p:timing>
 </p:sld>
@@ -23386,14 +23444,14 @@
       </p:par>
     </p:tnLst>
     <p:bldLst>
-      <p:bldP spid="3" grpId="0" build="whole" animBg="1"/>
-      <p:bldP spid="4" grpId="0" build="whole" animBg="1"/>
-      <p:bldP spid="5" grpId="0" build="whole" animBg="1"/>
-      <p:bldP spid="6" grpId="0" build="whole" animBg="1"/>
-      <p:bldP spid="7" grpId="0" build="whole" animBg="1"/>
-      <p:bldP spid="8" grpId="0" build="whole" animBg="1"/>
-      <p:bldP spid="9" grpId="0" build="whole" animBg="1"/>
-      <p:bldP spid="10" grpId="0" build="whole" animBg="1"/>
+      <p:bldP spid="3" grpId="0" animBg="1"/>
+      <p:bldP spid="4" grpId="0" animBg="1"/>
+      <p:bldP spid="5" grpId="0" animBg="1"/>
+      <p:bldP spid="6" grpId="0" animBg="1"/>
+      <p:bldP spid="7" grpId="0" animBg="1"/>
+      <p:bldP spid="8" grpId="0" animBg="1"/>
+      <p:bldP spid="9" grpId="0" animBg="1"/>
+      <p:bldP spid="10" grpId="0" animBg="1"/>
     </p:bldLst>
   </p:timing>
 </p:sld>
@@ -23757,7 +23815,7 @@
           </a:fontRef>
         </p:style>
         <p:txBody>
-          <a:bodyPr rtlCol="0" anchor="ctr" wrap="square" lIns="274320" rIns="274320"/>
+          <a:bodyPr wrap="square" lIns="274320" rIns="274320" rtlCol="0" anchor="ctr"/>
           <a:lstStyle/>
           <a:p>
             <a:pPr algn="l"/>
@@ -23901,7 +23959,7 @@
                             </p:stCondLst>
                             <p:childTnLst>
                               <p:par>
-                                <p:cTn id="9" presetID="53" presetClass="entr" presetSubtype="16" fill="hold" grpId="0" nodeType="afterEffect">
+                                <p:cTn id="9" presetID="53" presetClass="entr" presetSubtype="16" fill="hold" nodeType="afterEffect">
                                   <p:stCondLst>
                                     <p:cond delay="0"/>
                                   </p:stCondLst>
@@ -24141,10 +24199,10 @@
       </p:par>
     </p:tnLst>
     <p:bldLst>
-      <p:bldP spid="3" grpId="0" build="whole" animBg="1"/>
-      <p:bldP spid="4" grpId="0" build="whole" animBg="1"/>
-      <p:bldP spid="7" grpId="0" build="whole" animBg="1"/>
-      <p:bldP spid="6" grpId="0" build="whole" animBg="1"/>
+      <p:bldP spid="3" grpId="0" animBg="1"/>
+      <p:bldP spid="4" grpId="0" animBg="1"/>
+      <p:bldP spid="6" grpId="0" animBg="1"/>
+      <p:bldP spid="7" grpId="0" animBg="1"/>
     </p:bldLst>
   </p:timing>
 </p:sld>
@@ -24508,7 +24566,7 @@
           </a:fontRef>
         </p:style>
         <p:txBody>
-          <a:bodyPr rtlCol="0" anchor="ctr" wrap="square" lIns="274320" rIns="274320"/>
+          <a:bodyPr wrap="square" lIns="274320" rIns="274320" rtlCol="0" anchor="ctr"/>
           <a:lstStyle/>
           <a:p>
             <a:pPr algn="l"/>
@@ -24627,7 +24685,7 @@
                             </p:stCondLst>
                             <p:childTnLst>
                               <p:par>
-                                <p:cTn id="9" presetID="53" presetClass="entr" presetSubtype="16" fill="hold" grpId="0" nodeType="afterEffect">
+                                <p:cTn id="9" presetID="53" presetClass="entr" presetSubtype="16" fill="hold" nodeType="afterEffect">
                                   <p:stCondLst>
                                     <p:cond delay="0"/>
                                   </p:stCondLst>
@@ -24867,10 +24925,10 @@
       </p:par>
     </p:tnLst>
     <p:bldLst>
-      <p:bldP spid="3" grpId="0" build="whole" animBg="1"/>
-      <p:bldP spid="4" grpId="0" build="whole" animBg="1"/>
-      <p:bldP spid="7" grpId="0" build="whole" animBg="1"/>
-      <p:bldP spid="6" grpId="0" build="whole" animBg="1"/>
+      <p:bldP spid="3" grpId="0" animBg="1"/>
+      <p:bldP spid="4" grpId="0" animBg="1"/>
+      <p:bldP spid="6" grpId="0" animBg="1"/>
+      <p:bldP spid="7" grpId="0" animBg="1"/>
     </p:bldLst>
   </p:timing>
 </p:sld>
@@ -25234,7 +25292,7 @@
           </a:fontRef>
         </p:style>
         <p:txBody>
-          <a:bodyPr rtlCol="0" anchor="ctr" wrap="square" lIns="274320" rIns="274320"/>
+          <a:bodyPr wrap="square" lIns="274320" rIns="274320" rtlCol="0" anchor="ctr"/>
           <a:lstStyle/>
           <a:p>
             <a:pPr algn="l"/>
@@ -25353,7 +25411,7 @@
                             </p:stCondLst>
                             <p:childTnLst>
                               <p:par>
-                                <p:cTn id="9" presetID="53" presetClass="entr" presetSubtype="16" fill="hold" grpId="0" nodeType="afterEffect">
+                                <p:cTn id="9" presetID="53" presetClass="entr" presetSubtype="16" fill="hold" nodeType="afterEffect">
                                   <p:stCondLst>
                                     <p:cond delay="0"/>
                                   </p:stCondLst>
@@ -25593,10 +25651,10 @@
       </p:par>
     </p:tnLst>
     <p:bldLst>
-      <p:bldP spid="3" grpId="0" build="whole" animBg="1"/>
-      <p:bldP spid="4" grpId="0" build="whole" animBg="1"/>
-      <p:bldP spid="7" grpId="0" build="whole" animBg="1"/>
-      <p:bldP spid="6" grpId="0" build="whole" animBg="1"/>
+      <p:bldP spid="3" grpId="0" animBg="1"/>
+      <p:bldP spid="4" grpId="0" animBg="1"/>
+      <p:bldP spid="6" grpId="0" animBg="1"/>
+      <p:bldP spid="7" grpId="0" animBg="1"/>
     </p:bldLst>
   </p:timing>
 </p:sld>
@@ -25960,7 +26018,7 @@
           </a:fontRef>
         </p:style>
         <p:txBody>
-          <a:bodyPr rtlCol="0" anchor="ctr" wrap="square" lIns="274320" rIns="274320"/>
+          <a:bodyPr wrap="square" lIns="274320" rIns="274320" rtlCol="0" anchor="ctr"/>
           <a:lstStyle/>
           <a:p>
             <a:pPr algn="l"/>
@@ -26079,7 +26137,7 @@
                             </p:stCondLst>
                             <p:childTnLst>
                               <p:par>
-                                <p:cTn id="9" presetID="53" presetClass="entr" presetSubtype="16" fill="hold" grpId="0" nodeType="afterEffect">
+                                <p:cTn id="9" presetID="53" presetClass="entr" presetSubtype="16" fill="hold" nodeType="afterEffect">
                                   <p:stCondLst>
                                     <p:cond delay="0"/>
                                   </p:stCondLst>
@@ -26319,10 +26377,10 @@
       </p:par>
     </p:tnLst>
     <p:bldLst>
-      <p:bldP spid="3" grpId="0" build="whole" animBg="1"/>
-      <p:bldP spid="4" grpId="0" build="whole" animBg="1"/>
-      <p:bldP spid="7" grpId="0" build="whole" animBg="1"/>
-      <p:bldP spid="6" grpId="0" build="whole" animBg="1"/>
+      <p:bldP spid="3" grpId="0" animBg="1"/>
+      <p:bldP spid="4" grpId="0" animBg="1"/>
+      <p:bldP spid="6" grpId="0" animBg="1"/>
+      <p:bldP spid="7" grpId="0" animBg="1"/>
     </p:bldLst>
   </p:timing>
 </p:sld>
@@ -26686,7 +26744,7 @@
           </a:fontRef>
         </p:style>
         <p:txBody>
-          <a:bodyPr rtlCol="0" anchor="ctr" wrap="square" lIns="274320" rIns="274320"/>
+          <a:bodyPr wrap="square" lIns="274320" rIns="274320" rtlCol="0" anchor="ctr"/>
           <a:lstStyle/>
           <a:p>
             <a:pPr algn="l"/>
@@ -26805,7 +26863,7 @@
                             </p:stCondLst>
                             <p:childTnLst>
                               <p:par>
-                                <p:cTn id="9" presetID="53" presetClass="entr" presetSubtype="16" fill="hold" grpId="0" nodeType="afterEffect">
+                                <p:cTn id="9" presetID="53" presetClass="entr" presetSubtype="16" fill="hold" nodeType="afterEffect">
                                   <p:stCondLst>
                                     <p:cond delay="0"/>
                                   </p:stCondLst>
@@ -27045,10 +27103,10 @@
       </p:par>
     </p:tnLst>
     <p:bldLst>
-      <p:bldP spid="3" grpId="0" build="whole" animBg="1"/>
-      <p:bldP spid="4" grpId="0" build="whole" animBg="1"/>
-      <p:bldP spid="7" grpId="0" build="whole" animBg="1"/>
-      <p:bldP spid="6" grpId="0" build="whole" animBg="1"/>
+      <p:bldP spid="3" grpId="0" animBg="1"/>
+      <p:bldP spid="4" grpId="0" animBg="1"/>
+      <p:bldP spid="6" grpId="0" animBg="1"/>
+      <p:bldP spid="7" grpId="0" animBg="1"/>
     </p:bldLst>
   </p:timing>
 </p:sld>
@@ -27412,7 +27470,7 @@
           </a:fontRef>
         </p:style>
         <p:txBody>
-          <a:bodyPr rtlCol="0" anchor="ctr" wrap="square" lIns="274320" rIns="274320"/>
+          <a:bodyPr wrap="square" lIns="274320" rIns="274320" rtlCol="0" anchor="ctr"/>
           <a:lstStyle/>
           <a:p>
             <a:pPr algn="l"/>
@@ -27531,7 +27589,7 @@
                             </p:stCondLst>
                             <p:childTnLst>
                               <p:par>
-                                <p:cTn id="9" presetID="53" presetClass="entr" presetSubtype="16" fill="hold" grpId="0" nodeType="afterEffect">
+                                <p:cTn id="9" presetID="53" presetClass="entr" presetSubtype="16" fill="hold" nodeType="afterEffect">
                                   <p:stCondLst>
                                     <p:cond delay="0"/>
                                   </p:stCondLst>
@@ -27771,10 +27829,10 @@
       </p:par>
     </p:tnLst>
     <p:bldLst>
-      <p:bldP spid="3" grpId="0" build="whole" animBg="1"/>
-      <p:bldP spid="4" grpId="0" build="whole" animBg="1"/>
-      <p:bldP spid="7" grpId="0" build="whole" animBg="1"/>
-      <p:bldP spid="6" grpId="0" build="whole" animBg="1"/>
+      <p:bldP spid="3" grpId="0" animBg="1"/>
+      <p:bldP spid="4" grpId="0" animBg="1"/>
+      <p:bldP spid="6" grpId="0" animBg="1"/>
+      <p:bldP spid="7" grpId="0" animBg="1"/>
     </p:bldLst>
   </p:timing>
 </p:sld>
@@ -28138,7 +28196,7 @@
           </a:fontRef>
         </p:style>
         <p:txBody>
-          <a:bodyPr rtlCol="0" anchor="ctr" wrap="square" lIns="274320" rIns="274320"/>
+          <a:bodyPr wrap="square" lIns="274320" rIns="274320" rtlCol="0" anchor="ctr"/>
           <a:lstStyle/>
           <a:p>
             <a:pPr algn="l"/>
@@ -28257,7 +28315,7 @@
                             </p:stCondLst>
                             <p:childTnLst>
                               <p:par>
-                                <p:cTn id="9" presetID="53" presetClass="entr" presetSubtype="16" fill="hold" grpId="0" nodeType="afterEffect">
+                                <p:cTn id="9" presetID="53" presetClass="entr" presetSubtype="16" fill="hold" nodeType="afterEffect">
                                   <p:stCondLst>
                                     <p:cond delay="0"/>
                                   </p:stCondLst>
@@ -28497,10 +28555,10 @@
       </p:par>
     </p:tnLst>
     <p:bldLst>
-      <p:bldP spid="3" grpId="0" build="whole" animBg="1"/>
-      <p:bldP spid="4" grpId="0" build="whole" animBg="1"/>
-      <p:bldP spid="7" grpId="0" build="whole" animBg="1"/>
-      <p:bldP spid="6" grpId="0" build="whole" animBg="1"/>
+      <p:bldP spid="3" grpId="0" animBg="1"/>
+      <p:bldP spid="4" grpId="0" animBg="1"/>
+      <p:bldP spid="6" grpId="0" animBg="1"/>
+      <p:bldP spid="7" grpId="0" animBg="1"/>
     </p:bldLst>
   </p:timing>
 </p:sld>
@@ -28864,7 +28922,7 @@
           </a:fontRef>
         </p:style>
         <p:txBody>
-          <a:bodyPr rtlCol="0" anchor="ctr" wrap="square" lIns="274320" rIns="274320"/>
+          <a:bodyPr wrap="square" lIns="274320" rIns="274320" rtlCol="0" anchor="ctr"/>
           <a:lstStyle/>
           <a:p>
             <a:pPr algn="l"/>
@@ -29008,7 +29066,7 @@
                             </p:stCondLst>
                             <p:childTnLst>
                               <p:par>
-                                <p:cTn id="9" presetID="53" presetClass="entr" presetSubtype="16" fill="hold" grpId="0" nodeType="afterEffect">
+                                <p:cTn id="9" presetID="53" presetClass="entr" presetSubtype="16" fill="hold" nodeType="afterEffect">
                                   <p:stCondLst>
                                     <p:cond delay="0"/>
                                   </p:stCondLst>
@@ -29248,10 +29306,10 @@
       </p:par>
     </p:tnLst>
     <p:bldLst>
-      <p:bldP spid="3" grpId="0" build="whole" animBg="1"/>
-      <p:bldP spid="4" grpId="0" build="whole" animBg="1"/>
-      <p:bldP spid="7" grpId="0" build="whole" animBg="1"/>
-      <p:bldP spid="6" grpId="0" build="whole" animBg="1"/>
+      <p:bldP spid="3" grpId="0" animBg="1"/>
+      <p:bldP spid="4" grpId="0" animBg="1"/>
+      <p:bldP spid="6" grpId="0" animBg="1"/>
+      <p:bldP spid="7" grpId="0" animBg="1"/>
     </p:bldLst>
   </p:timing>
 </p:sld>
@@ -29934,7 +29992,7 @@
           </a:fontRef>
         </p:style>
         <p:txBody>
-          <a:bodyPr rtlCol="0" anchor="ctr" wrap="square" lIns="685800" rIns="164592" tIns="164592" bIns="164592"/>
+          <a:bodyPr wrap="square" lIns="685800" tIns="164592" rIns="164592" bIns="164592" rtlCol="0" anchor="ctr"/>
           <a:lstStyle/>
           <a:p>
             <a:pPr algn="l">
@@ -30018,7 +30076,7 @@
           </a:fontRef>
         </p:style>
         <p:txBody>
-          <a:bodyPr rtlCol="0" anchor="ctr" wrap="square" lIns="0" rIns="0" tIns="0" bIns="0"/>
+          <a:bodyPr wrap="square" lIns="0" tIns="0" rIns="0" bIns="0" rtlCol="0" anchor="ctr"/>
           <a:lstStyle/>
           <a:p>
             <a:pPr algn="ctr">
@@ -30243,7 +30301,7 @@
                             </p:stCondLst>
                             <p:childTnLst>
                               <p:par>
-                                <p:cTn id="16" presetID="22" presetClass="entr" presetSubtype="8" fill="hold" grpId="0" nodeType="afterEffect">
+                                <p:cTn id="16" presetID="22" presetClass="entr" presetSubtype="8" fill="hold" nodeType="afterEffect">
                                   <p:stCondLst>
                                     <p:cond delay="0"/>
                                   </p:stCondLst>
@@ -30599,13 +30657,13 @@
       </p:par>
     </p:tnLst>
     <p:bldLst>
-      <p:bldP spid="3" grpId="0" build="whole" animBg="1"/>
-      <p:bldP spid="4" grpId="0" build="whole" animBg="1"/>
-      <p:bldP spid="6" grpId="0" build="whole" animBg="1"/>
-      <p:bldP spid="7" grpId="0" build="whole" animBg="1"/>
-      <p:bldP spid="9" grpId="0" build="whole" animBg="1"/>
-      <p:bldP spid="10" grpId="0" build="whole" animBg="1"/>
-      <p:bldP spid="8" grpId="0" build="whole" animBg="1"/>
+      <p:bldP spid="3" grpId="0" animBg="1"/>
+      <p:bldP spid="4" grpId="0" animBg="1"/>
+      <p:bldP spid="6" grpId="0" animBg="1"/>
+      <p:bldP spid="7" grpId="0" animBg="1"/>
+      <p:bldP spid="8" grpId="0" animBg="1"/>
+      <p:bldP spid="9" grpId="0" animBg="1"/>
+      <p:bldP spid="10" grpId="0" animBg="1"/>
     </p:bldLst>
   </p:timing>
 </p:sld>
@@ -30975,7 +31033,7 @@
           </a:fontRef>
         </p:style>
         <p:txBody>
-          <a:bodyPr rtlCol="0" anchor="ctr" wrap="square" lIns="685800" rIns="164592" tIns="164592" bIns="164592"/>
+          <a:bodyPr wrap="square" lIns="685800" tIns="164592" rIns="164592" bIns="164592" rtlCol="0" anchor="ctr"/>
           <a:lstStyle/>
           <a:p>
             <a:pPr algn="l">
@@ -31084,7 +31142,7 @@
           </a:fontRef>
         </p:style>
         <p:txBody>
-          <a:bodyPr rtlCol="0" anchor="ctr" wrap="square" lIns="0" rIns="0" tIns="0" bIns="0"/>
+          <a:bodyPr wrap="square" lIns="0" tIns="0" rIns="0" bIns="0" rtlCol="0" anchor="ctr"/>
           <a:lstStyle/>
           <a:p>
             <a:pPr algn="ctr">
@@ -31323,10 +31381,10 @@
       </p:par>
     </p:tnLst>
     <p:bldLst>
-      <p:bldP spid="3" grpId="0" build="whole" animBg="1"/>
-      <p:bldP spid="5" grpId="0" build="whole" animBg="1"/>
-      <p:bldP spid="6" grpId="0" build="whole" animBg="1"/>
-      <p:bldP spid="4" grpId="0" build="whole" animBg="1"/>
+      <p:bldP spid="3" grpId="0" animBg="1"/>
+      <p:bldP spid="4" grpId="0" animBg="1"/>
+      <p:bldP spid="5" grpId="0" animBg="1"/>
+      <p:bldP spid="6" grpId="0" animBg="1"/>
     </p:bldLst>
   </p:timing>
 </p:sld>
@@ -32204,7 +32262,7 @@
         </p:nvSpPr>
         <p:spPr>
           <a:xfrm>
-            <a:off x="731520" y="5155625"/>
+            <a:off x="891540" y="6193908"/>
             <a:ext cx="10424160" cy="664092"/>
           </a:xfrm>
           <a:prstGeom prst="rect">
@@ -32227,7 +32285,7 @@
               </a:spcAft>
             </a:pPr>
             <a:r>
-              <a:rPr sz="1400" b="0" i="0" u="none">
+              <a:rPr sz="1400" b="0" i="0" u="none" dirty="0">
                 <a:solidFill>
                   <a:srgbClr val="5C6B7A"/>
                 </a:solidFill>
@@ -32235,7 +32293,29 @@
                 <a:ea typeface="Montserrat"/>
                 <a:cs typeface="Montserrat"/>
               </a:rPr>
-              <a:t>OJT: On the Job Training. Fuente: MEPT, Definiciones y numeral 2.1.</a:t>
+              <a:t>OJT: On the Job Training. Fuente: MEPT, </a:t>
+            </a:r>
+            <a:r>
+              <a:rPr sz="1400" b="0" i="0" u="none" dirty="0" err="1">
+                <a:solidFill>
+                  <a:srgbClr val="5C6B7A"/>
+                </a:solidFill>
+                <a:latin typeface="Montserrat"/>
+                <a:ea typeface="Montserrat"/>
+                <a:cs typeface="Montserrat"/>
+              </a:rPr>
+              <a:t>Definiciones</a:t>
+            </a:r>
+            <a:r>
+              <a:rPr sz="1400" b="0" i="0" u="none" dirty="0">
+                <a:solidFill>
+                  <a:srgbClr val="5C6B7A"/>
+                </a:solidFill>
+                <a:latin typeface="Montserrat"/>
+                <a:ea typeface="Montserrat"/>
+                <a:cs typeface="Montserrat"/>
+              </a:rPr>
+              <a:t> y numeral 2.1.</a:t>
             </a:r>
           </a:p>
         </p:txBody>
@@ -32248,7 +32328,7 @@
         </p:nvSpPr>
         <p:spPr>
           <a:xfrm>
-            <a:off x="1051560" y="5166360"/>
+            <a:off x="1051560" y="5250324"/>
             <a:ext cx="10104120" cy="731520"/>
           </a:xfrm>
           <a:prstGeom prst="roundRect">
@@ -32287,7 +32367,7 @@
           </a:fontRef>
         </p:style>
         <p:txBody>
-          <a:bodyPr rtlCol="0" anchor="ctr" wrap="square" lIns="685800" rIns="164592" tIns="164592" bIns="164592"/>
+          <a:bodyPr wrap="square" lIns="685800" tIns="164592" rIns="164592" bIns="164592" rtlCol="0" anchor="ctr"/>
           <a:lstStyle/>
           <a:p>
             <a:pPr algn="l">
@@ -32304,10 +32384,54 @@
                 <a:ea typeface="Montserrat Medium"/>
                 <a:cs typeface="Montserrat Medium"/>
               </a:rPr>
-              <a:t>No basta con saber la teoría: en el OJT </a:t>
-            </a:r>
-            <a:r>
-              <a:rPr sz="1500" b="1" i="0" u="none">
+              <a:t>No basta con saber la </a:t>
+            </a:r>
+            <a:r>
+              <a:rPr sz="1500" b="0" i="0" u="none" dirty="0" err="1">
+                <a:solidFill>
+                  <a:srgbClr val="182430"/>
+                </a:solidFill>
+                <a:latin typeface="Montserrat Medium"/>
+                <a:ea typeface="Montserrat Medium"/>
+                <a:cs typeface="Montserrat Medium"/>
+              </a:rPr>
+              <a:t>teoría</a:t>
+            </a:r>
+            <a:r>
+              <a:rPr sz="1500" b="0" i="0" u="none" dirty="0">
+                <a:solidFill>
+                  <a:srgbClr val="182430"/>
+                </a:solidFill>
+                <a:latin typeface="Montserrat Medium"/>
+                <a:ea typeface="Montserrat Medium"/>
+                <a:cs typeface="Montserrat Medium"/>
+              </a:rPr>
+              <a:t>: </a:t>
+            </a:r>
+            <a:r>
+              <a:rPr sz="1500" b="0" i="0" u="none" dirty="0" err="1">
+                <a:solidFill>
+                  <a:srgbClr val="182430"/>
+                </a:solidFill>
+                <a:latin typeface="Montserrat Medium"/>
+                <a:ea typeface="Montserrat Medium"/>
+                <a:cs typeface="Montserrat Medium"/>
+              </a:rPr>
+              <a:t>en</a:t>
+            </a:r>
+            <a:r>
+              <a:rPr sz="1500" b="0" i="0" u="none" dirty="0">
+                <a:solidFill>
+                  <a:srgbClr val="182430"/>
+                </a:solidFill>
+                <a:latin typeface="Montserrat Medium"/>
+                <a:ea typeface="Montserrat Medium"/>
+                <a:cs typeface="Montserrat Medium"/>
+              </a:rPr>
+              <a:t> el OJT </a:t>
+            </a:r>
+            <a:r>
+              <a:rPr sz="1500" b="1" i="0" u="none" dirty="0" err="1">
                 <a:solidFill>
                   <a:srgbClr val="0E2A47"/>
                 </a:solidFill>
@@ -32321,7 +32445,7 @@
               <a:t>demuestras</a:t>
             </a:r>
             <a:r>
-              <a:rPr sz="1500" b="0" i="0" u="none">
+              <a:rPr sz="1500" b="0" i="0" u="none" dirty="0">
                 <a:solidFill>
                   <a:srgbClr val="182430"/>
                 </a:solidFill>
@@ -32329,10 +32453,208 @@
                 <a:ea typeface="Montserrat Medium"/>
                 <a:cs typeface="Montserrat Medium"/>
               </a:rPr>
-              <a:t> que puedes realizar cada tarea de tu especialidad, acompañado por un </a:t>
-            </a:r>
-            <a:r>
-              <a:rPr sz="1500" b="1" i="0" u="none">
+              <a:t> </a:t>
+            </a:r>
+            <a:r>
+              <a:rPr sz="1500" b="0" i="0" u="none" dirty="0" err="1">
+                <a:solidFill>
+                  <a:srgbClr val="182430"/>
+                </a:solidFill>
+                <a:latin typeface="Montserrat Medium"/>
+                <a:ea typeface="Montserrat Medium"/>
+                <a:cs typeface="Montserrat Medium"/>
+              </a:rPr>
+              <a:t>que</a:t>
+            </a:r>
+            <a:r>
+              <a:rPr sz="1500" b="0" i="0" u="none" dirty="0">
+                <a:solidFill>
+                  <a:srgbClr val="182430"/>
+                </a:solidFill>
+                <a:latin typeface="Montserrat Medium"/>
+                <a:ea typeface="Montserrat Medium"/>
+                <a:cs typeface="Montserrat Medium"/>
+              </a:rPr>
+              <a:t> </a:t>
+            </a:r>
+            <a:r>
+              <a:rPr sz="1500" b="0" i="0" u="none" dirty="0" err="1">
+                <a:solidFill>
+                  <a:srgbClr val="182430"/>
+                </a:solidFill>
+                <a:latin typeface="Montserrat Medium"/>
+                <a:ea typeface="Montserrat Medium"/>
+                <a:cs typeface="Montserrat Medium"/>
+              </a:rPr>
+              <a:t>puedes</a:t>
+            </a:r>
+            <a:r>
+              <a:rPr sz="1500" b="0" i="0" u="none" dirty="0">
+                <a:solidFill>
+                  <a:srgbClr val="182430"/>
+                </a:solidFill>
+                <a:latin typeface="Montserrat Medium"/>
+                <a:ea typeface="Montserrat Medium"/>
+                <a:cs typeface="Montserrat Medium"/>
+              </a:rPr>
+              <a:t> </a:t>
+            </a:r>
+            <a:r>
+              <a:rPr sz="1500" b="0" i="0" u="none" dirty="0" err="1">
+                <a:solidFill>
+                  <a:srgbClr val="182430"/>
+                </a:solidFill>
+                <a:latin typeface="Montserrat Medium"/>
+                <a:ea typeface="Montserrat Medium"/>
+                <a:cs typeface="Montserrat Medium"/>
+              </a:rPr>
+              <a:t>realizar</a:t>
+            </a:r>
+            <a:r>
+              <a:rPr sz="1500" b="0" i="0" u="none" dirty="0">
+                <a:solidFill>
+                  <a:srgbClr val="182430"/>
+                </a:solidFill>
+                <a:latin typeface="Montserrat Medium"/>
+                <a:ea typeface="Montserrat Medium"/>
+                <a:cs typeface="Montserrat Medium"/>
+              </a:rPr>
+              <a:t> </a:t>
+            </a:r>
+            <a:r>
+              <a:rPr sz="1500" b="0" i="0" u="none" dirty="0" err="1">
+                <a:solidFill>
+                  <a:srgbClr val="182430"/>
+                </a:solidFill>
+                <a:latin typeface="Montserrat Medium"/>
+                <a:ea typeface="Montserrat Medium"/>
+                <a:cs typeface="Montserrat Medium"/>
+              </a:rPr>
+              <a:t>cada</a:t>
+            </a:r>
+            <a:r>
+              <a:rPr sz="1500" b="0" i="0" u="none" dirty="0">
+                <a:solidFill>
+                  <a:srgbClr val="182430"/>
+                </a:solidFill>
+                <a:latin typeface="Montserrat Medium"/>
+                <a:ea typeface="Montserrat Medium"/>
+                <a:cs typeface="Montserrat Medium"/>
+              </a:rPr>
+              <a:t> </a:t>
+            </a:r>
+            <a:r>
+              <a:rPr sz="1500" b="0" i="0" u="none" dirty="0" err="1">
+                <a:solidFill>
+                  <a:srgbClr val="182430"/>
+                </a:solidFill>
+                <a:latin typeface="Montserrat Medium"/>
+                <a:ea typeface="Montserrat Medium"/>
+                <a:cs typeface="Montserrat Medium"/>
+              </a:rPr>
+              <a:t>tarea</a:t>
+            </a:r>
+            <a:r>
+              <a:rPr sz="1500" b="0" i="0" u="none" dirty="0">
+                <a:solidFill>
+                  <a:srgbClr val="182430"/>
+                </a:solidFill>
+                <a:latin typeface="Montserrat Medium"/>
+                <a:ea typeface="Montserrat Medium"/>
+                <a:cs typeface="Montserrat Medium"/>
+              </a:rPr>
+              <a:t> de </a:t>
+            </a:r>
+            <a:r>
+              <a:rPr sz="1500" b="0" i="0" u="none" dirty="0" err="1">
+                <a:solidFill>
+                  <a:srgbClr val="182430"/>
+                </a:solidFill>
+                <a:latin typeface="Montserrat Medium"/>
+                <a:ea typeface="Montserrat Medium"/>
+                <a:cs typeface="Montserrat Medium"/>
+              </a:rPr>
+              <a:t>tu</a:t>
+            </a:r>
+            <a:r>
+              <a:rPr sz="1500" b="0" i="0" u="none" dirty="0">
+                <a:solidFill>
+                  <a:srgbClr val="182430"/>
+                </a:solidFill>
+                <a:latin typeface="Montserrat Medium"/>
+                <a:ea typeface="Montserrat Medium"/>
+                <a:cs typeface="Montserrat Medium"/>
+              </a:rPr>
+              <a:t> </a:t>
+            </a:r>
+            <a:r>
+              <a:rPr sz="1500" b="0" i="0" u="none" dirty="0" err="1">
+                <a:solidFill>
+                  <a:srgbClr val="182430"/>
+                </a:solidFill>
+                <a:latin typeface="Montserrat Medium"/>
+                <a:ea typeface="Montserrat Medium"/>
+                <a:cs typeface="Montserrat Medium"/>
+              </a:rPr>
+              <a:t>especialidad</a:t>
+            </a:r>
+            <a:r>
+              <a:rPr sz="1500" b="0" i="0" u="none" dirty="0">
+                <a:solidFill>
+                  <a:srgbClr val="182430"/>
+                </a:solidFill>
+                <a:latin typeface="Montserrat Medium"/>
+                <a:ea typeface="Montserrat Medium"/>
+                <a:cs typeface="Montserrat Medium"/>
+              </a:rPr>
+              <a:t>, </a:t>
+            </a:r>
+            <a:r>
+              <a:rPr sz="1500" b="0" i="0" u="none" dirty="0" err="1">
+                <a:solidFill>
+                  <a:srgbClr val="182430"/>
+                </a:solidFill>
+                <a:latin typeface="Montserrat Medium"/>
+                <a:ea typeface="Montserrat Medium"/>
+                <a:cs typeface="Montserrat Medium"/>
+              </a:rPr>
+              <a:t>acompañado</a:t>
+            </a:r>
+            <a:r>
+              <a:rPr sz="1500" b="0" i="0" u="none" dirty="0">
+                <a:solidFill>
+                  <a:srgbClr val="182430"/>
+                </a:solidFill>
+                <a:latin typeface="Montserrat Medium"/>
+                <a:ea typeface="Montserrat Medium"/>
+                <a:cs typeface="Montserrat Medium"/>
+              </a:rPr>
+              <a:t> </a:t>
+            </a:r>
+            <a:r>
+              <a:rPr sz="1500" b="0" i="0" u="none" dirty="0" err="1">
+                <a:solidFill>
+                  <a:srgbClr val="182430"/>
+                </a:solidFill>
+                <a:latin typeface="Montserrat Medium"/>
+                <a:ea typeface="Montserrat Medium"/>
+                <a:cs typeface="Montserrat Medium"/>
+              </a:rPr>
+              <a:t>por</a:t>
+            </a:r>
+            <a:r>
+              <a:rPr sz="1500" b="0" i="0" u="none" dirty="0">
+                <a:solidFill>
+                  <a:srgbClr val="182430"/>
+                </a:solidFill>
+                <a:latin typeface="Montserrat Medium"/>
+                <a:ea typeface="Montserrat Medium"/>
+                <a:cs typeface="Montserrat Medium"/>
+              </a:rPr>
+              <a:t> un </a:t>
+            </a:r>
+            <a:r>
+              <a:rPr sz="1500" b="1" i="0" u="none" dirty="0">
                 <a:solidFill>
                   <a:srgbClr val="0E2A47"/>
                 </a:solidFill>
@@ -32343,21 +32665,10 @@
                 <a:ea typeface="Montserrat Medium"/>
                 <a:cs typeface="Montserrat Medium"/>
               </a:rPr>
-              <a:t>instructor designado</a:t>
-            </a:r>
-            <a:r>
-              <a:rPr sz="1500" b="0" i="0" u="none">
-                <a:solidFill>
-                  <a:srgbClr val="182430"/>
-                </a:solidFill>
-                <a:latin typeface="Montserrat Medium"/>
-                <a:ea typeface="Montserrat Medium"/>
-                <a:cs typeface="Montserrat Medium"/>
-              </a:rPr>
-              <a:t>, y queda </a:t>
-            </a:r>
-            <a:r>
-              <a:rPr sz="1500" b="1" i="0" u="none">
+              <a:t>instructor </a:t>
+            </a:r>
+            <a:r>
+              <a:rPr sz="1500" b="1" i="0" u="none" dirty="0" err="1">
                 <a:solidFill>
                   <a:srgbClr val="0E2A47"/>
                 </a:solidFill>
@@ -32368,10 +32679,57 @@
                 <a:ea typeface="Montserrat Medium"/>
                 <a:cs typeface="Montserrat Medium"/>
               </a:rPr>
+              <a:t>designado</a:t>
+            </a:r>
+            <a:r>
+              <a:rPr sz="1500" b="0" i="0" u="none" dirty="0">
+                <a:solidFill>
+                  <a:srgbClr val="182430"/>
+                </a:solidFill>
+                <a:latin typeface="Montserrat Medium"/>
+                <a:ea typeface="Montserrat Medium"/>
+                <a:cs typeface="Montserrat Medium"/>
+              </a:rPr>
+              <a:t>, y </a:t>
+            </a:r>
+            <a:r>
+              <a:rPr sz="1500" b="0" i="0" u="none" dirty="0" err="1">
+                <a:solidFill>
+                  <a:srgbClr val="182430"/>
+                </a:solidFill>
+                <a:latin typeface="Montserrat Medium"/>
+                <a:ea typeface="Montserrat Medium"/>
+                <a:cs typeface="Montserrat Medium"/>
+              </a:rPr>
+              <a:t>queda</a:t>
+            </a:r>
+            <a:r>
+              <a:rPr sz="1500" b="0" i="0" u="none" dirty="0">
+                <a:solidFill>
+                  <a:srgbClr val="182430"/>
+                </a:solidFill>
+                <a:latin typeface="Montserrat Medium"/>
+                <a:ea typeface="Montserrat Medium"/>
+                <a:cs typeface="Montserrat Medium"/>
+              </a:rPr>
+              <a:t> </a:t>
+            </a:r>
+            <a:r>
+              <a:rPr sz="1500" b="1" i="0" u="none" dirty="0" err="1">
+                <a:solidFill>
+                  <a:srgbClr val="0E2A47"/>
+                </a:solidFill>
+                <a:highlight>
+                  <a:srgbClr val="EFDDB0"/>
+                </a:highlight>
+                <a:latin typeface="Montserrat Medium"/>
+                <a:ea typeface="Montserrat Medium"/>
+                <a:cs typeface="Montserrat Medium"/>
+              </a:rPr>
               <a:t>evidencia</a:t>
             </a:r>
             <a:r>
-              <a:rPr sz="1500" b="0" i="0" u="none">
+              <a:rPr sz="1500" b="0" i="0" u="none" dirty="0">
                 <a:solidFill>
                   <a:srgbClr val="182430"/>
                 </a:solidFill>
@@ -32379,7 +32737,51 @@
                 <a:ea typeface="Montserrat Medium"/>
                 <a:cs typeface="Montserrat Medium"/>
               </a:rPr>
-              <a:t> de cada nivel.</a:t>
+              <a:t> de </a:t>
+            </a:r>
+            <a:r>
+              <a:rPr sz="1500" b="0" i="0" u="none" dirty="0" err="1">
+                <a:solidFill>
+                  <a:srgbClr val="182430"/>
+                </a:solidFill>
+                <a:latin typeface="Montserrat Medium"/>
+                <a:ea typeface="Montserrat Medium"/>
+                <a:cs typeface="Montserrat Medium"/>
+              </a:rPr>
+              <a:t>cada</a:t>
+            </a:r>
+            <a:r>
+              <a:rPr sz="1500" b="0" i="0" u="none" dirty="0">
+                <a:solidFill>
+                  <a:srgbClr val="182430"/>
+                </a:solidFill>
+                <a:latin typeface="Montserrat Medium"/>
+                <a:ea typeface="Montserrat Medium"/>
+                <a:cs typeface="Montserrat Medium"/>
+              </a:rPr>
+              <a:t> </a:t>
+            </a:r>
+            <a:r>
+              <a:rPr sz="1500" b="0" i="0" u="none" dirty="0" err="1">
+                <a:solidFill>
+                  <a:srgbClr val="182430"/>
+                </a:solidFill>
+                <a:latin typeface="Montserrat Medium"/>
+                <a:ea typeface="Montserrat Medium"/>
+                <a:cs typeface="Montserrat Medium"/>
+              </a:rPr>
+              <a:t>nivel</a:t>
+            </a:r>
+            <a:r>
+              <a:rPr sz="1500" b="0" i="0" u="none" dirty="0">
+                <a:solidFill>
+                  <a:srgbClr val="182430"/>
+                </a:solidFill>
+                <a:latin typeface="Montserrat Medium"/>
+                <a:ea typeface="Montserrat Medium"/>
+                <a:cs typeface="Montserrat Medium"/>
+              </a:rPr>
+              <a:t>.</a:t>
             </a:r>
           </a:p>
         </p:txBody>
@@ -32392,7 +32794,7 @@
         </p:nvSpPr>
         <p:spPr>
           <a:xfrm>
-            <a:off x="731520" y="5166360"/>
+            <a:off x="731520" y="5250324"/>
             <a:ext cx="731520" cy="731520"/>
           </a:xfrm>
           <a:prstGeom prst="ellipse">
@@ -32421,7 +32823,7 @@
           </a:fontRef>
         </p:style>
         <p:txBody>
-          <a:bodyPr rtlCol="0" anchor="ctr" wrap="square" lIns="0" rIns="0" tIns="0" bIns="0"/>
+          <a:bodyPr wrap="square" lIns="0" tIns="0" rIns="0" bIns="0" rtlCol="0" anchor="ctr"/>
           <a:lstStyle/>
           <a:p>
             <a:pPr algn="ctr">
@@ -32995,15 +33397,15 @@
       </p:par>
     </p:tnLst>
     <p:bldLst>
-      <p:bldP spid="3" grpId="0" build="whole" animBg="1"/>
-      <p:bldP spid="4" grpId="0" build="whole" animBg="1"/>
-      <p:bldP spid="5" grpId="0" build="whole" animBg="1"/>
-      <p:bldP spid="6" grpId="0" build="whole" animBg="1"/>
-      <p:bldP spid="7" grpId="0" build="whole" animBg="1"/>
-      <p:bldP spid="8" grpId="0" build="whole" animBg="1"/>
-      <p:bldP spid="9" grpId="0" build="whole" animBg="1"/>
-      <p:bldP spid="10" grpId="0" build="whole" animBg="1"/>
-      <p:bldP spid="11" grpId="0" build="whole" animBg="1"/>
+      <p:bldP spid="3" grpId="0" animBg="1"/>
+      <p:bldP spid="4" grpId="0" animBg="1"/>
+      <p:bldP spid="5" grpId="0" animBg="1"/>
+      <p:bldP spid="6" grpId="0" animBg="1"/>
+      <p:bldP spid="7" grpId="0" animBg="1"/>
+      <p:bldP spid="8" grpId="0" animBg="1"/>
+      <p:bldP spid="9" grpId="0" animBg="1"/>
+      <p:bldP spid="10" grpId="0" animBg="1"/>
+      <p:bldP spid="11" grpId="0" animBg="1"/>
     </p:bldLst>
   </p:timing>
 </p:sld>
@@ -33976,7 +34378,7 @@
           </a:fontRef>
         </p:style>
         <p:txBody>
-          <a:bodyPr rtlCol="0" anchor="ctr" wrap="square" lIns="685800" rIns="164592" tIns="164592" bIns="164592"/>
+          <a:bodyPr wrap="square" lIns="685800" tIns="164592" rIns="164592" bIns="164592" rtlCol="0" anchor="ctr"/>
           <a:lstStyle/>
           <a:p>
             <a:pPr algn="l">
@@ -34085,7 +34487,7 @@
           </a:fontRef>
         </p:style>
         <p:txBody>
-          <a:bodyPr rtlCol="0" anchor="ctr" wrap="square" lIns="0" rIns="0" tIns="0" bIns="0"/>
+          <a:bodyPr wrap="square" lIns="0" tIns="0" rIns="0" bIns="0" rtlCol="0" anchor="ctr"/>
           <a:lstStyle/>
           <a:p>
             <a:pPr algn="ctr">
@@ -34310,7 +34712,7 @@
                             </p:stCondLst>
                             <p:childTnLst>
                               <p:par>
-                                <p:cTn id="16" presetID="22" presetClass="entr" presetSubtype="8" fill="hold" grpId="0" nodeType="afterEffect">
+                                <p:cTn id="16" presetID="22" presetClass="entr" presetSubtype="8" fill="hold" nodeType="afterEffect">
                                   <p:stCondLst>
                                     <p:cond delay="0"/>
                                   </p:stCondLst>
@@ -34525,7 +34927,7 @@
                             </p:stCondLst>
                             <p:childTnLst>
                               <p:par>
-                                <p:cTn id="31" presetID="22" presetClass="entr" presetSubtype="8" fill="hold" grpId="0" nodeType="afterEffect">
+                                <p:cTn id="31" presetID="22" presetClass="entr" presetSubtype="8" fill="hold" nodeType="afterEffect">
                                   <p:stCondLst>
                                     <p:cond delay="0"/>
                                   </p:stCondLst>
@@ -34740,7 +35142,7 @@
                             </p:stCondLst>
                             <p:childTnLst>
                               <p:par>
-                                <p:cTn id="46" presetID="22" presetClass="entr" presetSubtype="8" fill="hold" grpId="0" nodeType="afterEffect">
+                                <p:cTn id="46" presetID="22" presetClass="entr" presetSubtype="8" fill="hold" nodeType="afterEffect">
                                   <p:stCondLst>
                                     <p:cond delay="0"/>
                                   </p:stCondLst>
@@ -35140,18 +35542,18 @@
       </p:par>
     </p:tnLst>
     <p:bldLst>
-      <p:bldP spid="3" grpId="0" build="whole" animBg="1"/>
-      <p:bldP spid="4" grpId="0" build="whole" animBg="1"/>
-      <p:bldP spid="6" grpId="0" build="whole" animBg="1"/>
-      <p:bldP spid="7" grpId="0" build="whole" animBg="1"/>
-      <p:bldP spid="9" grpId="0" build="whole" animBg="1"/>
-      <p:bldP spid="10" grpId="0" build="whole" animBg="1"/>
-      <p:bldP spid="12" grpId="0" build="whole" animBg="1"/>
-      <p:bldP spid="13" grpId="0" build="whole" animBg="1"/>
-      <p:bldP spid="14" grpId="0" build="whole" animBg="1"/>
-      <p:bldP spid="16" grpId="0" build="whole" animBg="1"/>
-      <p:bldP spid="17" grpId="0" build="whole" animBg="1"/>
-      <p:bldP spid="15" grpId="0" build="whole" animBg="1"/>
+      <p:bldP spid="3" grpId="0" animBg="1"/>
+      <p:bldP spid="4" grpId="0" animBg="1"/>
+      <p:bldP spid="6" grpId="0" animBg="1"/>
+      <p:bldP spid="7" grpId="0" animBg="1"/>
+      <p:bldP spid="9" grpId="0" animBg="1"/>
+      <p:bldP spid="10" grpId="0" animBg="1"/>
+      <p:bldP spid="12" grpId="0" animBg="1"/>
+      <p:bldP spid="13" grpId="0" animBg="1"/>
+      <p:bldP spid="14" grpId="0" animBg="1"/>
+      <p:bldP spid="15" grpId="0" animBg="1"/>
+      <p:bldP spid="16" grpId="0" animBg="1"/>
+      <p:bldP spid="17" grpId="0" animBg="1"/>
     </p:bldLst>
   </p:timing>
 </p:sld>
@@ -35984,7 +36386,7 @@
                             </p:stCondLst>
                             <p:childTnLst>
                               <p:par>
-                                <p:cTn id="9" presetID="53" presetClass="entr" presetSubtype="16" fill="hold" grpId="0" nodeType="afterEffect">
+                                <p:cTn id="9" presetID="53" presetClass="entr" presetSubtype="16" fill="hold" nodeType="afterEffect">
                                   <p:stCondLst>
                                     <p:cond delay="0"/>
                                   </p:stCondLst>
@@ -36180,9 +36582,9 @@
       </p:par>
     </p:tnLst>
     <p:bldLst>
-      <p:bldP spid="4" grpId="0" build="whole" animBg="1"/>
-      <p:bldP spid="5" grpId="0" build="whole" animBg="1"/>
-      <p:bldP spid="6" grpId="0" build="whole" animBg="1"/>
+      <p:bldP spid="4" grpId="0" animBg="1"/>
+      <p:bldP spid="5" grpId="0" animBg="1"/>
+      <p:bldP spid="6" grpId="0" animBg="1"/>
     </p:bldLst>
   </p:timing>
 </p:sld>
@@ -38204,19 +38606,19 @@
       </p:par>
     </p:tnLst>
     <p:bldLst>
-      <p:bldP spid="3" grpId="0" build="whole" animBg="1"/>
-      <p:bldP spid="4" grpId="0" build="whole" animBg="1"/>
-      <p:bldP spid="6" grpId="0" build="whole" animBg="1"/>
-      <p:bldP spid="7" grpId="0" build="whole" animBg="1"/>
-      <p:bldP spid="8" grpId="0" build="whole" animBg="1"/>
-      <p:bldP spid="9" grpId="0" build="whole" animBg="1"/>
-      <p:bldP spid="10" grpId="0" build="whole" animBg="1"/>
-      <p:bldP spid="14" grpId="0" build="whole" animBg="1"/>
-      <p:bldP spid="5" grpId="0" build="whole" animBg="1"/>
-      <p:bldP spid="11" grpId="0" build="whole" animBg="1"/>
-      <p:bldP spid="12" grpId="0" build="whole" animBg="1"/>
-      <p:bldP spid="13" grpId="0" build="whole" animBg="1"/>
-      <p:bldP spid="15" grpId="0" build="whole" animBg="1"/>
+      <p:bldP spid="3" grpId="0" animBg="1"/>
+      <p:bldP spid="4" grpId="0" animBg="1"/>
+      <p:bldP spid="5" grpId="0" animBg="1"/>
+      <p:bldP spid="6" grpId="0" animBg="1"/>
+      <p:bldP spid="7" grpId="0" animBg="1"/>
+      <p:bldP spid="8" grpId="0" animBg="1"/>
+      <p:bldP spid="9" grpId="0" animBg="1"/>
+      <p:bldP spid="10" grpId="0" animBg="1"/>
+      <p:bldP spid="11" grpId="0" animBg="1"/>
+      <p:bldP spid="12" grpId="0" animBg="1"/>
+      <p:bldP spid="13" grpId="0" animBg="1"/>
+      <p:bldP spid="14" grpId="0" animBg="1"/>
+      <p:bldP spid="15" grpId="0" animBg="1"/>
     </p:bldLst>
   </p:timing>
 </p:sld>
@@ -40391,18 +40793,18 @@
       </p:par>
     </p:tnLst>
     <p:bldLst>
-      <p:bldP spid="3" grpId="0" build="whole" animBg="1"/>
-      <p:bldP spid="4" grpId="0" build="whole" animBg="1"/>
-      <p:bldP spid="5" grpId="0" build="whole" animBg="1"/>
-      <p:bldP spid="6" grpId="0" build="whole" animBg="1"/>
-      <p:bldP spid="7" grpId="0" build="whole" animBg="1"/>
-      <p:bldP spid="8" grpId="0" build="whole" animBg="1"/>
-      <p:bldP spid="9" grpId="0" build="whole" animBg="1"/>
-      <p:bldP spid="10" grpId="0" build="whole" animBg="1"/>
-      <p:bldP spid="11" grpId="0" build="whole" animBg="1"/>
-      <p:bldP spid="12" grpId="0" build="whole" animBg="1"/>
-      <p:bldP spid="13" grpId="0" build="whole" animBg="1"/>
-      <p:bldP spid="14" grpId="0" build="whole" animBg="1"/>
+      <p:bldP spid="3" grpId="0" animBg="1"/>
+      <p:bldP spid="4" grpId="0" animBg="1"/>
+      <p:bldP spid="5" grpId="0" animBg="1"/>
+      <p:bldP spid="6" grpId="0" animBg="1"/>
+      <p:bldP spid="7" grpId="0" animBg="1"/>
+      <p:bldP spid="8" grpId="0" animBg="1"/>
+      <p:bldP spid="9" grpId="0" animBg="1"/>
+      <p:bldP spid="10" grpId="0" animBg="1"/>
+      <p:bldP spid="11" grpId="0" animBg="1"/>
+      <p:bldP spid="12" grpId="0" animBg="1"/>
+      <p:bldP spid="13" grpId="0" animBg="1"/>
+      <p:bldP spid="14" grpId="0" animBg="1"/>
     </p:bldLst>
   </p:timing>
 </p:sld>
@@ -40867,7 +41269,7 @@
           </a:fontRef>
         </p:style>
         <p:txBody>
-          <a:bodyPr rtlCol="0" anchor="ctr" wrap="square" lIns="685800" rIns="164592" tIns="164592" bIns="164592"/>
+          <a:bodyPr wrap="square" lIns="685800" tIns="164592" rIns="164592" bIns="164592" rtlCol="0" anchor="ctr"/>
           <a:lstStyle/>
           <a:p>
             <a:pPr algn="l">
@@ -40976,7 +41378,7 @@
           </a:fontRef>
         </p:style>
         <p:txBody>
-          <a:bodyPr rtlCol="0" anchor="ctr" wrap="square" lIns="0" rIns="0" tIns="0" bIns="0"/>
+          <a:bodyPr wrap="square" lIns="0" tIns="0" rIns="0" bIns="0" rtlCol="0" anchor="ctr"/>
           <a:lstStyle/>
           <a:p>
             <a:pPr algn="ctr">
@@ -41074,7 +41476,7 @@
                             </p:stCondLst>
                             <p:childTnLst>
                               <p:par>
-                                <p:cTn id="9" presetID="53" presetClass="entr" presetSubtype="16" fill="hold" grpId="0" nodeType="afterEffect">
+                                <p:cTn id="9" presetID="53" presetClass="entr" presetSubtype="16" fill="hold" nodeType="afterEffect">
                                   <p:stCondLst>
                                     <p:cond delay="0"/>
                                   </p:stCondLst>
@@ -41261,9 +41663,9 @@
       </p:par>
     </p:tnLst>
     <p:bldLst>
-      <p:bldP spid="4" grpId="0" build="whole" animBg="1"/>
-      <p:bldP spid="7" grpId="0" build="whole" animBg="1"/>
-      <p:bldP spid="8" grpId="0" build="whole" animBg="1"/>
+      <p:bldP spid="4" grpId="0" animBg="1"/>
+      <p:bldP spid="7" grpId="0" animBg="1"/>
+      <p:bldP spid="8" grpId="0" animBg="1"/>
     </p:bldLst>
   </p:timing>
 </p:sld>
